--- a/slides/Assignment2_Regularization_MNIST_Frans_Alwan_Purba.pptx
+++ b/slides/Assignment2_Regularization_MNIST_Frans_Alwan_Purba.pptx
@@ -3843,8 +3843,19 @@
             </a:pPr>
             <a:r>
               <a:rPr dirty="0"/>
-              <a:t>https://github.com/fransalwan/mnist-regularization-experiments-pmml</a:t>
-            </a:r>
+              <a:t>https://github.com/</a:t>
+            </a:r>
+            <a:r>
+              <a:t>fransalwan/</a:t>
+            </a:r>
+            <a:r>
+              <a:rPr lang="en-US"/>
+              <a:t>fransalwan-</a:t>
+            </a:r>
+            <a:r>
+              <a:t>mnist-regularization-experiments-pmml</a:t>
+            </a:r>
+            <a:endParaRPr dirty="0"/>
           </a:p>
         </p:txBody>
       </p:sp>
